--- a/assets/powerpoints/module-n1-presenter/A1-bonjour-je-m-appelle.pptx
+++ b/assets/powerpoints/module-n1-presenter/A1-bonjour-je-m-appelle.pptx
@@ -10992,7 +10992,25 @@
                 </a:solidFill>
                 <a:latin typeface="Verdana"/>
               </a:rPr>
-              <a:t>On l'emploie partout : au centre, chez le médecin, au travail, avec un voisin. On peut aussi dire, entre amis : « &lt;b&gt;Moi, c'est&lt;/b&gt; Amina. »</a:t>
+              <a:t>On l'emploie partout : au centre, chez le médecin, au travail, avec un voisin. On peut aussi dire, entre amis : « </a:t>
+            </a:r>
+            <a:r>
+              <a:rPr sz="2000" b="1" i="0">
+                <a:solidFill>
+                  <a:srgbClr val="4B4F52"/>
+                </a:solidFill>
+                <a:latin typeface="Verdana"/>
+              </a:rPr>
+              <a:t>Moi, c'est</a:t>
+            </a:r>
+            <a:r>
+              <a:rPr sz="2000" b="0" i="0">
+                <a:solidFill>
+                  <a:srgbClr val="4B4F52"/>
+                </a:solidFill>
+                <a:latin typeface="Verdana"/>
+              </a:rPr>
+              <a:t> Amina. »</a:t>
             </a:r>
           </a:p>
         </p:txBody>
